--- a/decks/hist-williams-control/hist-williams-control_ch6_castles.pptx
+++ b/decks/hist-williams-control/hist-williams-control_ch6_castles.pptx
@@ -126,30 +126,30 @@
   <p:extLst>
     <p:ext uri="{521415D9-36F7-43E2-AB2F-B90AF26B5E84}">
       <p14:sectionLst xmlns:p14="http://schemas.microsoft.com/office/powerpoint/2010/main">
-        <p14:section name="Opening" id="{f1412f30-9624-ec8f-aa77-24619b0997b4}">
+        <p14:section name="Opening" id="{04c7781f-5878-6a99-0ede-9f0a2ca1dbe6}">
           <p14:sldIdLst>
             <p14:sldId id="256"/>
           </p14:sldIdLst>
         </p14:section>
-        <p14:section name="Gate" id="{aa36af1a-f6b1-1828-46c3-bbb593e68e97}">
+        <p14:section name="Gate" id="{09ebb1d6-23ee-4ac4-a3db-22c09fb7850a}">
           <p14:sldIdLst>
             <p14:sldId id="257"/>
             <p14:sldId id="258"/>
           </p14:sldIdLst>
         </p14:section>
-        <p14:section name="Pre-teach" id="{f89d4bc7-42c0-cc7c-d6b0-1b1be623eabe}">
+        <p14:section name="Pre-teach" id="{7a8b8ccd-ed9e-7e55-24c7-33c4bb588b66}">
           <p14:sldIdLst>
             <p14:sldId id="259"/>
             <p14:sldId id="260"/>
           </p14:sldIdLst>
         </p14:section>
-        <p14:section name="Read-along" id="{785d3d0a-0684-89de-e1f5-1faa260df083}">
+        <p14:section name="Read-along" id="{8f598bdf-c28d-d8c5-dfd5-9e814e9d6a65}">
           <p14:sldIdLst>
             <p14:sldId id="261"/>
             <p14:sldId id="262"/>
           </p14:sldIdLst>
         </p14:section>
-        <p14:section name="Teach" id="{1b6db401-7442-8f9e-7aeb-1a28743c496f}">
+        <p14:section name="Teach" id="{6fc0160e-1546-41e8-db51-94dc3ba1c95e}">
           <p14:sldIdLst>
             <p14:sldId id="263"/>
             <p14:sldId id="264"/>
@@ -158,7 +158,7 @@
             <p14:sldId id="267"/>
           </p14:sldIdLst>
         </p14:section>
-        <p14:section name="Routes" id="{c1c01e9b-c21d-aef1-2688-f141c8be9815}">
+        <p14:section name="Routes" id="{515b8f8e-619c-32df-48e3-afe65bf83885}">
           <p14:sldIdLst>
             <p14:sldId id="268"/>
             <p14:sldId id="269"/>
@@ -166,12 +166,12 @@
             <p14:sldId id="271"/>
           </p14:sldIdLst>
         </p14:section>
-        <p14:section name="Close" id="{b858af22-ff57-53d2-7c7b-dc17ee7cce07}">
+        <p14:section name="Close" id="{83df3fc0-9621-d5bc-6402-97ef51a74b5b}">
           <p14:sldIdLst>
             <p14:sldId id="272"/>
           </p14:sldIdLst>
         </p14:section>
-        <p14:section name="Answers" id="{537d5a17-c8ce-7261-bbf7-34d3e561c4c2}">
+        <p14:section name="Answers" id="{97812f9b-a770-e496-89b8-a81d2cd9dee1}">
           <p14:sldIdLst>
             <p14:sldId id="273"/>
             <p14:sldId id="274"/>
@@ -675,7 +675,7 @@
               <a:rPr lang="en-US" dirty="0"/>
               <a:t>Teach — Wood first, then stone. Say it in your own words, then check understanding with a quick question: ask a pupil from the pre-teach group first, since they met these words and ideas before the lesson. Pupils try to recall before you re-explain.
 At the start of William's reign, castles were built of wood. Wood was in good supply from England's forests, so a wooden castle could be built very quickly and easily, which mattered when a town had just rebelled. The disadvantage was obvious: a wooden castle would burn if set on fire.
-As time went on, the wooden castles were replaced by stronger stone castles, some of which still stand today. Stone took longer and cost more, but it did not burn and it lasted for centuries.
+Later the timber castles gave way to stone ones, far stronger, and a number of those are standing to this day. Stone took longer and cost more, but it did not burn and it lasted for centuries.
 The scale was enormous. In the 21 years of William's reign, from 1066 to 1087, the Normans built over 500 castles. That works out at roughly one castle every two weeks, for twenty-one years, without a break.
 Worked example — model it step by step, thinking aloud: Check the lesson's claim that the Normans built a castle about every two weeks. (1) William reigned for 21 years: 1087 − 1066 = 21. (2) There are 52 weeks in a year, so 21 × 52 = 1,092 weeks. (3) Over 500 castles in 1,092 weeks: 1,092 ÷ 500 ≈ 2.2 weeks per castle. (4) So one castle roughly every two weeks is a fair summary of the figures. Answer: About 2.2 weeks per castle, so the claim of one every two weeks is fair..</a:t>
             </a:r>
@@ -767,7 +767,7 @@
               <a:rPr lang="en-US" dirty="0"/>
               <a:t>Teach — Wood first, then stone. Say it in your own words, then check understanding with a quick question: ask a pupil from the pre-teach group first, since they met these words and ideas before the lesson. Pupils try to recall before you re-explain.
 At the start of William's reign, castles were built of wood. Wood was in good supply from England's forests, so a wooden castle could be built very quickly and easily, which mattered when a town had just rebelled. The disadvantage was obvious: a wooden castle would burn if set on fire.
-As time went on, the wooden castles were replaced by stronger stone castles, some of which still stand today. Stone took longer and cost more, but it did not burn and it lasted for centuries.
+Later the timber castles gave way to stone ones, far stronger, and a number of those are standing to this day. Stone took longer and cost more, but it did not burn and it lasted for centuries.
 The scale was enormous. In the 21 years of William's reign, from 1066 to 1087, the Normans built over 500 castles. That works out at roughly one castle every two weeks, for twenty-one years, without a break.
 Worked example — model it step by step, thinking aloud: Check the lesson's claim that the Normans built a castle about every two weeks. (1) William reigned for 21 years: 1087 − 1066 = 21. (2) There are 52 weeks in a year, so 21 × 52 = 1,092 weeks. (3) Over 500 castles in 1,092 weeks: 1,092 ÷ 500 ≈ 2.2 weeks per castle. (4) So one castle roughly every two weeks is a fair summary of the figures. Answer: About 2.2 weeks per castle, so the claim of one every two weeks is fair..</a:t>
             </a:r>
@@ -2260,7 +2260,7 @@
               <a:t>Teach — Outnumbered: why castles were needed. Say it in your own words, then check understanding with a quick question: ask a pupil from the pre-teach group first, since they met these words and ideas before the lesson. Pupils try to recall before you re-explain.
 Once William was crowned, he set about enforcing his control over the whole country. But he was hugely outnumbered. Only around 8,000 to 10,000 Normans settled in England with him, while the population of England in 1066 was around 1.5 to 2 million. Chapter 1 told you that Anglo-Saxon England had almost no castles. The Normans changed that.
 Wherever William's army went, it built castles, and barons were put in charge of them to make sure the Normans controlled key roads, ports, rivers and towns. Castles were normally built in areas that had rebelled or resisted. If a town rose up, the Normans built a castle to watch over it. The castle was a symbol of Norman strength and a visual reminder that rebellion was futile, meaning pointless.
-Castles worked both ways. They enforced William's rule on the people, and they protected the Norman soldiers from the unhappy English around them. Your lesson puts it in one line: castles meant that 10,000 Norman soldiers could control 500,000 Anglo-Saxon people.
+Castles worked both ways. They enforced William's rule on the people, and they protected the Norman soldiers from the unhappy English around them. Your lesson reduces it to two figures and one idea: 10,000 Norman soldiers, 500,000 Anglo-Saxon people, and castles to hold the difference.
 Tip: Two jobs for every castle: control the English outside, protect the Normans inside. Say both in any explanation.</a:t>
             </a:r>
             <a:endParaRPr lang="en-US" dirty="0"/>
@@ -4299,7 +4299,7 @@
                 <a:ea typeface="Calibri" pitchFamily="34" charset="-122"/>
                 <a:cs typeface="Calibri" pitchFamily="34" charset="-120"/>
               </a:rPr>
-              <a:t>As time went on, the wooden castles were replaced by stronger stone castles, some of which still stand today.</a:t>
+              <a:t>Later the timber castles gave way to stone ones, far stronger, and a number of those are standing to this day.</a:t>
             </a:r>
             <a:endParaRPr lang="en-US" sz="2400" dirty="0"/>
           </a:p>
